--- a/assets/fiches/E6-fiche-complet.pptx
+++ b/assets/fiches/E6-fiche-complet.pptx
@@ -6232,7 +6232,7 @@
         <p:spPr>
           <a:xfrm>
             <a:off x="529200" y="2127600"/>
-            <a:ext cx="6498000" cy="828000"/>
+            <a:ext cx="6498000" cy="1065600"/>
           </a:xfrm>
           <a:prstGeom prst="rect">
             <a:avLst/>
@@ -6399,7 +6399,7 @@
         <p:spPr>
           <a:xfrm>
             <a:off x="637200" y="2368800"/>
-            <a:ext cx="6300000" cy="529200"/>
+            <a:ext cx="6300000" cy="766800"/>
           </a:xfrm>
           <a:prstGeom prst="rect">
             <a:avLst/>

--- a/assets/fiches/E6-fiche-complet.pptx
+++ b/assets/fiches/E6-fiche-complet.pptx
@@ -6231,300 +6231,6 @@
         </p:nvSpPr>
         <p:spPr>
           <a:xfrm>
-            <a:off x="529200" y="2127600"/>
-            <a:ext cx="6498000" cy="1065600"/>
-          </a:xfrm>
-          <a:prstGeom prst="rect">
-            <a:avLst/>
-          </a:prstGeom>
-          <a:solidFill>
-            <a:srgbClr val="FFF8EF"/>
-          </a:solidFill>
-          <a:ln w="19050">
-            <a:solidFill>
-              <a:srgbClr val="E67D21"/>
-            </a:solidFill>
-          </a:ln>
-        </p:spPr>
-        <p:style>
-          <a:lnRef idx="1">
-            <a:schemeClr val="accent1"/>
-          </a:lnRef>
-          <a:fillRef idx="3">
-            <a:schemeClr val="accent1"/>
-          </a:fillRef>
-          <a:effectRef idx="2">
-            <a:schemeClr val="accent1"/>
-          </a:effectRef>
-          <a:fontRef idx="minor">
-            <a:schemeClr val="lt1"/>
-          </a:fontRef>
-        </p:style>
-        <p:txBody>
-          <a:bodyPr rtlCol="0" anchor="ctr"/>
-          <a:lstStyle/>
-          <a:p/>
-        </p:txBody>
-      </p:sp>
-      <p:sp>
-        <p:nvSpPr>
-          <p:cNvPr id="13" name="Rectangle 12"/>
-          <p:cNvSpPr/>
-          <p:nvPr/>
-        </p:nvSpPr>
-        <p:spPr>
-          <a:xfrm>
-            <a:off x="529200" y="2127600"/>
-            <a:ext cx="6498000" cy="198000"/>
-          </a:xfrm>
-          <a:prstGeom prst="rect">
-            <a:avLst/>
-          </a:prstGeom>
-          <a:solidFill>
-            <a:srgbClr val="E67D21"/>
-          </a:solidFill>
-          <a:ln>
-            <a:noFill/>
-          </a:ln>
-        </p:spPr>
-        <p:style>
-          <a:lnRef idx="1">
-            <a:schemeClr val="accent1"/>
-          </a:lnRef>
-          <a:fillRef idx="3">
-            <a:schemeClr val="accent1"/>
-          </a:fillRef>
-          <a:effectRef idx="2">
-            <a:schemeClr val="accent1"/>
-          </a:effectRef>
-          <a:fontRef idx="minor">
-            <a:schemeClr val="lt1"/>
-          </a:fontRef>
-        </p:style>
-        <p:txBody>
-          <a:bodyPr rtlCol="0" anchor="ctr"/>
-          <a:lstStyle/>
-          <a:p/>
-        </p:txBody>
-      </p:sp>
-      <p:sp>
-        <p:nvSpPr>
-          <p:cNvPr id="14" name="TextBox 13"/>
-          <p:cNvSpPr txBox="1"/>
-          <p:nvPr/>
-        </p:nvSpPr>
-        <p:spPr>
-          <a:xfrm>
-            <a:off x="601200" y="2156400"/>
-            <a:ext cx="6354000" cy="162000"/>
-          </a:xfrm>
-          <a:prstGeom prst="rect">
-            <a:avLst/>
-          </a:prstGeom>
-          <a:noFill/>
-        </p:spPr>
-        <p:txBody>
-          <a:bodyPr wrap="square" tIns="0" bIns="0" lIns="18000" rIns="18000">
-            <a:spAutoFit/>
-          </a:bodyPr>
-          <a:lstStyle/>
-          <a:p>
-            <a:pPr algn="ctr">
-              <a:spcBef>
-                <a:spcPts val="0"/>
-              </a:spcBef>
-              <a:spcAft>
-                <a:spcPts val="100"/>
-              </a:spcAft>
-            </a:pPr>
-            <a:r>
-              <a:rPr sz="850" b="1" i="0">
-                <a:solidFill>
-                  <a:srgbClr val="FFFFFF"/>
-                </a:solidFill>
-                <a:latin typeface="Arial"/>
-              </a:rPr>
-              <a:t>Blocs optionnels — À aborder si le temps le permet</a:t>
-            </a:r>
-          </a:p>
-        </p:txBody>
-      </p:sp>
-      <p:sp>
-        <p:nvSpPr>
-          <p:cNvPr id="15" name="Rectangle 14"/>
-          <p:cNvSpPr/>
-          <p:nvPr/>
-        </p:nvSpPr>
-        <p:spPr>
-          <a:xfrm>
-            <a:off x="529200" y="2325600"/>
-            <a:ext cx="6498000" cy="14400"/>
-          </a:xfrm>
-          <a:prstGeom prst="rect">
-            <a:avLst/>
-          </a:prstGeom>
-          <a:solidFill>
-            <a:srgbClr val="E67D21"/>
-          </a:solidFill>
-          <a:ln>
-            <a:noFill/>
-          </a:ln>
-        </p:spPr>
-        <p:style>
-          <a:lnRef idx="1">
-            <a:schemeClr val="accent1"/>
-          </a:lnRef>
-          <a:fillRef idx="3">
-            <a:schemeClr val="accent1"/>
-          </a:fillRef>
-          <a:effectRef idx="2">
-            <a:schemeClr val="accent1"/>
-          </a:effectRef>
-          <a:fontRef idx="minor">
-            <a:schemeClr val="lt1"/>
-          </a:fontRef>
-        </p:style>
-        <p:txBody>
-          <a:bodyPr rtlCol="0" anchor="ctr"/>
-          <a:lstStyle/>
-          <a:p/>
-        </p:txBody>
-      </p:sp>
-      <p:sp>
-        <p:nvSpPr>
-          <p:cNvPr id="16" name="TextBox 15"/>
-          <p:cNvSpPr txBox="1"/>
-          <p:nvPr/>
-        </p:nvSpPr>
-        <p:spPr>
-          <a:xfrm>
-            <a:off x="637200" y="2368800"/>
-            <a:ext cx="6300000" cy="766800"/>
-          </a:xfrm>
-          <a:prstGeom prst="rect">
-            <a:avLst/>
-          </a:prstGeom>
-          <a:noFill/>
-        </p:spPr>
-        <p:txBody>
-          <a:bodyPr wrap="square" tIns="0" bIns="0" lIns="18000" rIns="18000">
-            <a:spAutoFit/>
-          </a:bodyPr>
-          <a:lstStyle/>
-          <a:p>
-            <a:pPr algn="l">
-              <a:spcBef>
-                <a:spcPts val="0"/>
-              </a:spcBef>
-              <a:spcAft>
-                <a:spcPts val="100"/>
-              </a:spcAft>
-            </a:pPr>
-            <a:r>
-              <a:rPr sz="800" b="1" i="0">
-                <a:solidFill>
-                  <a:srgbClr val="E67D21"/>
-                </a:solidFill>
-                <a:latin typeface="Arial"/>
-              </a:rPr>
-              <a:t>8 min</a:t>
-            </a:r>
-          </a:p>
-          <a:p>
-            <a:pPr algn="l">
-              <a:spcBef>
-                <a:spcPts val="0"/>
-              </a:spcBef>
-              <a:spcAft>
-                <a:spcPts val="100"/>
-              </a:spcAft>
-            </a:pPr>
-            <a:r>
-              <a:rPr sz="900" b="1" i="0">
-                <a:solidFill>
-                  <a:srgbClr val="2B2B2B"/>
-                </a:solidFill>
-                <a:latin typeface="Arial"/>
-              </a:rPr>
-              <a:t>Le numérique responsable en entreprise</a:t>
-            </a:r>
-          </a:p>
-          <a:p>
-            <a:pPr>
-              <a:spcBef>
-                <a:spcPts val="0"/>
-              </a:spcBef>
-              <a:spcAft>
-                <a:spcPts val="100"/>
-              </a:spcAft>
-            </a:pPr>
-            <a:r>
-              <a:rPr sz="800" b="1">
-                <a:solidFill>
-                  <a:srgbClr val="E67D21"/>
-                </a:solidFill>
-                <a:latin typeface="Arial"/>
-              </a:rPr>
-              <a:t>OPT.  </a:t>
-            </a:r>
-            <a:r>
-              <a:rPr sz="800">
-                <a:solidFill>
-                  <a:srgbClr val="2B2B2B"/>
-                </a:solidFill>
-                <a:latin typeface="Arial"/>
-              </a:rPr>
-              <a:t>. Intégrer le numérique responsable au sein de votre organisation permet de r…</a:t>
-            </a:r>
-          </a:p>
-          <a:p>
-            <a:pPr algn="l">
-              <a:spcBef>
-                <a:spcPts val="0"/>
-              </a:spcBef>
-              <a:spcAft>
-                <a:spcPts val="100"/>
-              </a:spcAft>
-            </a:pPr>
-            <a:r>
-              <a:rPr sz="800" b="0" i="0">
-                <a:solidFill>
-                  <a:srgbClr val="2B2B2B"/>
-                </a:solidFill>
-                <a:latin typeface="Arial"/>
-              </a:rPr>
-              <a:t>. Politique d'achat responsable</a:t>
-            </a:r>
-          </a:p>
-          <a:p>
-            <a:pPr algn="l">
-              <a:spcBef>
-                <a:spcPts val="0"/>
-              </a:spcBef>
-              <a:spcAft>
-                <a:spcPts val="100"/>
-              </a:spcAft>
-            </a:pPr>
-            <a:r>
-              <a:rPr sz="800" b="0" i="0">
-                <a:solidFill>
-                  <a:srgbClr val="2B2B2B"/>
-                </a:solidFill>
-                <a:latin typeface="Arial"/>
-              </a:rPr>
-              <a:t>. Privilégiez les équipements reconditionnés ou conçus pour durer. Demandez d…</a:t>
-            </a:r>
-          </a:p>
-        </p:txBody>
-      </p:sp>
-      <p:sp>
-        <p:nvSpPr>
-          <p:cNvPr id="17" name="Rectangle 16"/>
-          <p:cNvSpPr/>
-          <p:nvPr/>
-        </p:nvSpPr>
-        <p:spPr>
-          <a:xfrm>
             <a:off x="529200" y="9684000"/>
             <a:ext cx="6498000" cy="43200"/>
           </a:xfrm>
@@ -6560,7 +6266,7 @@
       </p:sp>
       <p:sp>
         <p:nvSpPr>
-          <p:cNvPr id="18" name="TextBox 17"/>
+          <p:cNvPr id="13" name="TextBox 12"/>
           <p:cNvSpPr txBox="1"/>
           <p:nvPr/>
         </p:nvSpPr>

--- a/assets/fiches/E6-fiche-complet.pptx
+++ b/assets/fiches/E6-fiche-complet.pptx
@@ -3722,7 +3722,7 @@
                 </a:solidFill>
                 <a:latin typeface="Arial"/>
               </a:rPr>
-              <a:t>. On l'oublie souvent, mais le numérique est l'un des secteurs les plus émetteurs de gaz à e…</a:t>
+              <a:t>. On l'oublie souvent, mais le numérique est l'un des secteurs les plus émetteurs de gaz à effet de serre au monde. Et sa croissance est rapide.</a:t>
             </a:r>
           </a:p>
         </p:txBody>
@@ -3969,7 +3969,7 @@
                 </a:solidFill>
                 <a:latin typeface="Arial"/>
               </a:rPr>
-              <a:t>. La fabrication de nos appareils numériques est de loin la source d'impact la plus importan…</a:t>
+              <a:t>. La fabrication de nos appareils numériques est de loin la source d'impact la plus importante — bien plus que leur utilisation quotidienne.</a:t>
             </a:r>
           </a:p>
         </p:txBody>
@@ -4463,7 +4463,7 @@
                 </a:solidFill>
                 <a:latin typeface="Arial"/>
               </a:rPr>
-              <a:t>. Ces infrastructures discrètes sont le moteur de notre monde numérique, hébergeant nos donn…</a:t>
+              <a:t>. Ces infrastructures discrètes sont le moteur de notre monde numérique, hébergeant nos données et applications. Cependant, leur fonctionnement est incroyablement gourmand en ressources, notamment pour le refroidissement des serveurs et le maintien d'une température stable.</a:t>
             </a:r>
           </a:p>
         </p:txBody>
@@ -4710,7 +4710,7 @@
                 </a:solidFill>
                 <a:latin typeface="Arial"/>
               </a:rPr>
-              <a:t>. Les Déchets d'Équipements Électriques et Électroniques (DEEE), ou "e-waste", représentent …</a:t>
+              <a:t>. Les Déchets d'Équipements Électriques et Électroniques (DEEE), ou "e-waste", représentent aujourd'hui le flux de déchets qui croît le plus rapidement dans le monde. C'est une problématique environnementale et sanitaire majeure.</a:t>
             </a:r>
           </a:p>
         </p:txBody>
@@ -4957,7 +4957,7 @@
                 </a:solidFill>
                 <a:latin typeface="Arial"/>
               </a:rPr>
-              <a:t>. L'obsolescence, qu'elle soit programmée ou perçue, est un facteur majeur de l'empreinte en…</a:t>
+              <a:t>. L'obsolescence, qu'elle soit programmée ou perçue, est un facteur majeur de l'empreinte environnementale du numérique. Elle nous pousse à renouveler nos appareils bien avant la fin de leur durée de vie potentielle.</a:t>
             </a:r>
           </a:p>
         </p:txBody>
@@ -5204,7 +5204,7 @@
                 </a:solidFill>
                 <a:latin typeface="Arial"/>
               </a:rPr>
-              <a:t>. Plutôt que de céder à l'obsolescence programmée ou perçue, adoptons des gestes simples pou…</a:t>
+              <a:t>. Plutôt que de céder à l'obsolescence programmée ou perçue, adoptons des gestes simples pour prolonger la durée de vie de nos équipements. Chaque année gagnée, c'est une réduction significative de leur empreinte environnementale.</a:t>
             </a:r>
           </a:p>
         </p:txBody>
@@ -5451,7 +5451,7 @@
                 </a:solidFill>
                 <a:latin typeface="Arial"/>
               </a:rPr>
-              <a:t>. Adopter de petits gestes au quotidien peut avoir un impact significatif sur la réduction d…</a:t>
+              <a:t>. Adopter de petits gestes au quotidien peut avoir un impact significatif sur la réduction de votre empreinte numérique. Chaque action compte pour une consommation plus responsable des ressources.</a:t>
             </a:r>
           </a:p>
         </p:txBody>
@@ -5698,7 +5698,7 @@
                 </a:solidFill>
                 <a:latin typeface="Arial"/>
               </a:rPr>
-              <a:t>. L'intelligence artificielle, en particulier l'IA générative, est une technologie révolutio…</a:t>
+              <a:t>. L'intelligence artificielle, en particulier l'IA générative, est une technologie révolutionnaire mais aussi une gourmande insatiable en énergie et en ressources. Son empreinte environnementale croissante est une préoccupation majeure.</a:t>
             </a:r>
           </a:p>
         </p:txBody>
@@ -5971,7 +5971,7 @@
                 </a:solidFill>
                 <a:latin typeface="Arial"/>
               </a:rPr>
-              <a:t>. Face aux enjeux du numérique, des cadres réglementaires et des initiatives collectives éme…</a:t>
+              <a:t>. Face aux enjeux du numérique, des cadres réglementaires et des initiatives collectives émergent pour encourager des pratiques plus durables. Ces efforts visent à transformer en profondeur nos modes de production et de consommation.</a:t>
             </a:r>
           </a:p>
         </p:txBody>
@@ -6218,7 +6218,7 @@
                 </a:solidFill>
                 <a:latin typeface="Arial"/>
               </a:rPr>
-              <a:t>. Répondez à ces questions individuellement ou en petits groupes, puis partagez vos réflexio…</a:t>
+              <a:t>. Répondez à ces questions individuellement ou en petits groupes, puis partagez vos réflexions avec le reste de l'atelier.</a:t>
             </a:r>
           </a:p>
         </p:txBody>

--- a/assets/fiches/E6-fiche-complet.pptx
+++ b/assets/fiches/E6-fiche-complet.pptx
@@ -3097,9 +3097,35 @@
         <p:nvPr/>
       </p:nvGrpSpPr>
       <p:grpSpPr/>
-      <p:sp>
-        <p:nvSpPr>
-          <p:cNvPr id="2" name="TextBox 1"/>
+      <p:pic>
+        <p:nvPicPr>
+          <p:cNvPr id="2" name="Picture 1" descr="bg-p1.png"/>
+          <p:cNvPicPr>
+            <a:picLocks noChangeAspect="1"/>
+          </p:cNvPicPr>
+          <p:nvPr/>
+        </p:nvPicPr>
+        <p:blipFill>
+          <a:blip r:embed="rId2">
+            <a:alphaModFix amt="80000"/>
+          </a:blip>
+          <a:stretch>
+            <a:fillRect/>
+          </a:stretch>
+        </p:blipFill>
+        <p:spPr>
+          <a:xfrm>
+            <a:off x="0" y="0"/>
+            <a:ext cx="7556399" cy="10692000"/>
+          </a:xfrm>
+          <a:prstGeom prst="rect">
+            <a:avLst/>
+          </a:prstGeom>
+        </p:spPr>
+      </p:pic>
+      <p:sp>
+        <p:nvSpPr>
+          <p:cNvPr id="3" name="TextBox 2"/>
           <p:cNvSpPr txBox="1"/>
           <p:nvPr/>
         </p:nvSpPr>
@@ -3160,7 +3186,7 @@
       </p:sp>
       <p:sp>
         <p:nvSpPr>
-          <p:cNvPr id="3" name="Rectangle 2"/>
+          <p:cNvPr id="4" name="Rectangle 3"/>
           <p:cNvSpPr/>
           <p:nvPr/>
         </p:nvSpPr>
@@ -3203,7 +3229,7 @@
       </p:sp>
       <p:sp>
         <p:nvSpPr>
-          <p:cNvPr id="4" name="TextBox 3"/>
+          <p:cNvPr id="5" name="TextBox 4"/>
           <p:cNvSpPr txBox="1"/>
           <p:nvPr/>
         </p:nvSpPr>
@@ -3321,7 +3347,7 @@
       </p:sp>
       <p:sp>
         <p:nvSpPr>
-          <p:cNvPr id="5" name="Rectangle 4"/>
+          <p:cNvPr id="6" name="Rectangle 5"/>
           <p:cNvSpPr/>
           <p:nvPr/>
         </p:nvSpPr>
@@ -3364,7 +3390,7 @@
       </p:sp>
       <p:sp>
         <p:nvSpPr>
-          <p:cNvPr id="6" name="TextBox 5"/>
+          <p:cNvPr id="7" name="TextBox 6"/>
           <p:cNvSpPr txBox="1"/>
           <p:nvPr/>
         </p:nvSpPr>
@@ -3482,7 +3508,7 @@
       </p:sp>
       <p:sp>
         <p:nvSpPr>
-          <p:cNvPr id="7" name="Rectangle 6"/>
+          <p:cNvPr id="8" name="Rectangle 7"/>
           <p:cNvSpPr/>
           <p:nvPr/>
         </p:nvSpPr>
@@ -3525,7 +3551,7 @@
       </p:sp>
       <p:sp>
         <p:nvSpPr>
-          <p:cNvPr id="8" name="Rectangle 7"/>
+          <p:cNvPr id="9" name="Rectangle 8"/>
           <p:cNvSpPr/>
           <p:nvPr/>
         </p:nvSpPr>
@@ -3566,7 +3592,7 @@
       </p:sp>
       <p:sp>
         <p:nvSpPr>
-          <p:cNvPr id="9" name="Rectangle 8"/>
+          <p:cNvPr id="10" name="Rectangle 9"/>
           <p:cNvSpPr/>
           <p:nvPr/>
         </p:nvSpPr>
@@ -3607,7 +3633,7 @@
       </p:sp>
       <p:sp>
         <p:nvSpPr>
-          <p:cNvPr id="10" name="TextBox 9"/>
+          <p:cNvPr id="11" name="TextBox 10"/>
           <p:cNvSpPr txBox="1"/>
           <p:nvPr/>
         </p:nvSpPr>
@@ -3649,7 +3675,7 @@
       </p:sp>
       <p:sp>
         <p:nvSpPr>
-          <p:cNvPr id="11" name="TextBox 10"/>
+          <p:cNvPr id="12" name="TextBox 11"/>
           <p:cNvSpPr txBox="1"/>
           <p:nvPr/>
         </p:nvSpPr>
@@ -3729,7 +3755,7 @@
       </p:sp>
       <p:sp>
         <p:nvSpPr>
-          <p:cNvPr id="12" name="Rectangle 11"/>
+          <p:cNvPr id="13" name="Rectangle 12"/>
           <p:cNvSpPr/>
           <p:nvPr/>
         </p:nvSpPr>
@@ -3772,7 +3798,7 @@
       </p:sp>
       <p:sp>
         <p:nvSpPr>
-          <p:cNvPr id="13" name="Rectangle 12"/>
+          <p:cNvPr id="14" name="Rectangle 13"/>
           <p:cNvSpPr/>
           <p:nvPr/>
         </p:nvSpPr>
@@ -3813,7 +3839,7 @@
       </p:sp>
       <p:sp>
         <p:nvSpPr>
-          <p:cNvPr id="14" name="Rectangle 13"/>
+          <p:cNvPr id="15" name="Rectangle 14"/>
           <p:cNvSpPr/>
           <p:nvPr/>
         </p:nvSpPr>
@@ -3854,7 +3880,7 @@
       </p:sp>
       <p:sp>
         <p:nvSpPr>
-          <p:cNvPr id="15" name="TextBox 14"/>
+          <p:cNvPr id="16" name="TextBox 15"/>
           <p:cNvSpPr txBox="1"/>
           <p:nvPr/>
         </p:nvSpPr>
@@ -3896,7 +3922,7 @@
       </p:sp>
       <p:sp>
         <p:nvSpPr>
-          <p:cNvPr id="16" name="TextBox 15"/>
+          <p:cNvPr id="17" name="TextBox 16"/>
           <p:cNvSpPr txBox="1"/>
           <p:nvPr/>
         </p:nvSpPr>
@@ -3976,7 +4002,7 @@
       </p:sp>
       <p:sp>
         <p:nvSpPr>
-          <p:cNvPr id="17" name="Rectangle 16"/>
+          <p:cNvPr id="18" name="Rectangle 17"/>
           <p:cNvSpPr/>
           <p:nvPr/>
         </p:nvSpPr>
@@ -4019,7 +4045,7 @@
       </p:sp>
       <p:sp>
         <p:nvSpPr>
-          <p:cNvPr id="18" name="Rectangle 17"/>
+          <p:cNvPr id="19" name="Rectangle 18"/>
           <p:cNvSpPr/>
           <p:nvPr/>
         </p:nvSpPr>
@@ -4060,7 +4086,7 @@
       </p:sp>
       <p:sp>
         <p:nvSpPr>
-          <p:cNvPr id="19" name="Rectangle 18"/>
+          <p:cNvPr id="20" name="Rectangle 19"/>
           <p:cNvSpPr/>
           <p:nvPr/>
         </p:nvSpPr>
@@ -4101,7 +4127,7 @@
       </p:sp>
       <p:sp>
         <p:nvSpPr>
-          <p:cNvPr id="20" name="TextBox 19"/>
+          <p:cNvPr id="21" name="TextBox 20"/>
           <p:cNvSpPr txBox="1"/>
           <p:nvPr/>
         </p:nvSpPr>
@@ -4143,7 +4169,7 @@
       </p:sp>
       <p:sp>
         <p:nvSpPr>
-          <p:cNvPr id="21" name="TextBox 20"/>
+          <p:cNvPr id="22" name="TextBox 21"/>
           <p:cNvSpPr txBox="1"/>
           <p:nvPr/>
         </p:nvSpPr>
@@ -4223,7 +4249,7 @@
       </p:sp>
       <p:sp>
         <p:nvSpPr>
-          <p:cNvPr id="22" name="Rectangle 21"/>
+          <p:cNvPr id="23" name="Rectangle 22"/>
           <p:cNvSpPr/>
           <p:nvPr/>
         </p:nvSpPr>
@@ -4266,7 +4292,7 @@
       </p:sp>
       <p:sp>
         <p:nvSpPr>
-          <p:cNvPr id="23" name="Rectangle 22"/>
+          <p:cNvPr id="24" name="Rectangle 23"/>
           <p:cNvSpPr/>
           <p:nvPr/>
         </p:nvSpPr>
@@ -4307,7 +4333,7 @@
       </p:sp>
       <p:sp>
         <p:nvSpPr>
-          <p:cNvPr id="24" name="Rectangle 23"/>
+          <p:cNvPr id="25" name="Rectangle 24"/>
           <p:cNvSpPr/>
           <p:nvPr/>
         </p:nvSpPr>
@@ -4348,7 +4374,7 @@
       </p:sp>
       <p:sp>
         <p:nvSpPr>
-          <p:cNvPr id="25" name="TextBox 24"/>
+          <p:cNvPr id="26" name="TextBox 25"/>
           <p:cNvSpPr txBox="1"/>
           <p:nvPr/>
         </p:nvSpPr>
@@ -4390,7 +4416,7 @@
       </p:sp>
       <p:sp>
         <p:nvSpPr>
-          <p:cNvPr id="26" name="TextBox 25"/>
+          <p:cNvPr id="27" name="TextBox 26"/>
           <p:cNvSpPr txBox="1"/>
           <p:nvPr/>
         </p:nvSpPr>
@@ -4470,7 +4496,7 @@
       </p:sp>
       <p:sp>
         <p:nvSpPr>
-          <p:cNvPr id="27" name="Rectangle 26"/>
+          <p:cNvPr id="28" name="Rectangle 27"/>
           <p:cNvSpPr/>
           <p:nvPr/>
         </p:nvSpPr>
@@ -4513,7 +4539,7 @@
       </p:sp>
       <p:sp>
         <p:nvSpPr>
-          <p:cNvPr id="28" name="Rectangle 27"/>
+          <p:cNvPr id="29" name="Rectangle 28"/>
           <p:cNvSpPr/>
           <p:nvPr/>
         </p:nvSpPr>
@@ -4554,7 +4580,7 @@
       </p:sp>
       <p:sp>
         <p:nvSpPr>
-          <p:cNvPr id="29" name="Rectangle 28"/>
+          <p:cNvPr id="30" name="Rectangle 29"/>
           <p:cNvSpPr/>
           <p:nvPr/>
         </p:nvSpPr>
@@ -4595,7 +4621,7 @@
       </p:sp>
       <p:sp>
         <p:nvSpPr>
-          <p:cNvPr id="30" name="TextBox 29"/>
+          <p:cNvPr id="31" name="TextBox 30"/>
           <p:cNvSpPr txBox="1"/>
           <p:nvPr/>
         </p:nvSpPr>
@@ -4637,7 +4663,7 @@
       </p:sp>
       <p:sp>
         <p:nvSpPr>
-          <p:cNvPr id="31" name="TextBox 30"/>
+          <p:cNvPr id="32" name="TextBox 31"/>
           <p:cNvSpPr txBox="1"/>
           <p:nvPr/>
         </p:nvSpPr>
@@ -4717,7 +4743,7 @@
       </p:sp>
       <p:sp>
         <p:nvSpPr>
-          <p:cNvPr id="32" name="Rectangle 31"/>
+          <p:cNvPr id="33" name="Rectangle 32"/>
           <p:cNvSpPr/>
           <p:nvPr/>
         </p:nvSpPr>
@@ -4760,7 +4786,7 @@
       </p:sp>
       <p:sp>
         <p:nvSpPr>
-          <p:cNvPr id="33" name="Rectangle 32"/>
+          <p:cNvPr id="34" name="Rectangle 33"/>
           <p:cNvSpPr/>
           <p:nvPr/>
         </p:nvSpPr>
@@ -4801,7 +4827,7 @@
       </p:sp>
       <p:sp>
         <p:nvSpPr>
-          <p:cNvPr id="34" name="Rectangle 33"/>
+          <p:cNvPr id="35" name="Rectangle 34"/>
           <p:cNvSpPr/>
           <p:nvPr/>
         </p:nvSpPr>
@@ -4842,7 +4868,7 @@
       </p:sp>
       <p:sp>
         <p:nvSpPr>
-          <p:cNvPr id="35" name="TextBox 34"/>
+          <p:cNvPr id="36" name="TextBox 35"/>
           <p:cNvSpPr txBox="1"/>
           <p:nvPr/>
         </p:nvSpPr>
@@ -4884,7 +4910,7 @@
       </p:sp>
       <p:sp>
         <p:nvSpPr>
-          <p:cNvPr id="36" name="TextBox 35"/>
+          <p:cNvPr id="37" name="TextBox 36"/>
           <p:cNvSpPr txBox="1"/>
           <p:nvPr/>
         </p:nvSpPr>
@@ -4964,7 +4990,7 @@
       </p:sp>
       <p:sp>
         <p:nvSpPr>
-          <p:cNvPr id="37" name="Rectangle 36"/>
+          <p:cNvPr id="38" name="Rectangle 37"/>
           <p:cNvSpPr/>
           <p:nvPr/>
         </p:nvSpPr>
@@ -5007,7 +5033,7 @@
       </p:sp>
       <p:sp>
         <p:nvSpPr>
-          <p:cNvPr id="38" name="Rectangle 37"/>
+          <p:cNvPr id="39" name="Rectangle 38"/>
           <p:cNvSpPr/>
           <p:nvPr/>
         </p:nvSpPr>
@@ -5048,7 +5074,7 @@
       </p:sp>
       <p:sp>
         <p:nvSpPr>
-          <p:cNvPr id="39" name="Rectangle 38"/>
+          <p:cNvPr id="40" name="Rectangle 39"/>
           <p:cNvSpPr/>
           <p:nvPr/>
         </p:nvSpPr>
@@ -5089,7 +5115,7 @@
       </p:sp>
       <p:sp>
         <p:nvSpPr>
-          <p:cNvPr id="40" name="TextBox 39"/>
+          <p:cNvPr id="41" name="TextBox 40"/>
           <p:cNvSpPr txBox="1"/>
           <p:nvPr/>
         </p:nvSpPr>
@@ -5131,7 +5157,7 @@
       </p:sp>
       <p:sp>
         <p:nvSpPr>
-          <p:cNvPr id="41" name="TextBox 40"/>
+          <p:cNvPr id="42" name="TextBox 41"/>
           <p:cNvSpPr txBox="1"/>
           <p:nvPr/>
         </p:nvSpPr>
@@ -5211,7 +5237,7 @@
       </p:sp>
       <p:sp>
         <p:nvSpPr>
-          <p:cNvPr id="42" name="Rectangle 41"/>
+          <p:cNvPr id="43" name="Rectangle 42"/>
           <p:cNvSpPr/>
           <p:nvPr/>
         </p:nvSpPr>
@@ -5254,7 +5280,7 @@
       </p:sp>
       <p:sp>
         <p:nvSpPr>
-          <p:cNvPr id="43" name="Rectangle 42"/>
+          <p:cNvPr id="44" name="Rectangle 43"/>
           <p:cNvSpPr/>
           <p:nvPr/>
         </p:nvSpPr>
@@ -5295,7 +5321,7 @@
       </p:sp>
       <p:sp>
         <p:nvSpPr>
-          <p:cNvPr id="44" name="Rectangle 43"/>
+          <p:cNvPr id="45" name="Rectangle 44"/>
           <p:cNvSpPr/>
           <p:nvPr/>
         </p:nvSpPr>
@@ -5336,7 +5362,7 @@
       </p:sp>
       <p:sp>
         <p:nvSpPr>
-          <p:cNvPr id="45" name="TextBox 44"/>
+          <p:cNvPr id="46" name="TextBox 45"/>
           <p:cNvSpPr txBox="1"/>
           <p:nvPr/>
         </p:nvSpPr>
@@ -5378,7 +5404,7 @@
       </p:sp>
       <p:sp>
         <p:nvSpPr>
-          <p:cNvPr id="46" name="TextBox 45"/>
+          <p:cNvPr id="47" name="TextBox 46"/>
           <p:cNvSpPr txBox="1"/>
           <p:nvPr/>
         </p:nvSpPr>
@@ -5458,7 +5484,7 @@
       </p:sp>
       <p:sp>
         <p:nvSpPr>
-          <p:cNvPr id="47" name="Rectangle 46"/>
+          <p:cNvPr id="48" name="Rectangle 47"/>
           <p:cNvSpPr/>
           <p:nvPr/>
         </p:nvSpPr>
@@ -5501,7 +5527,7 @@
       </p:sp>
       <p:sp>
         <p:nvSpPr>
-          <p:cNvPr id="48" name="Rectangle 47"/>
+          <p:cNvPr id="49" name="Rectangle 48"/>
           <p:cNvSpPr/>
           <p:nvPr/>
         </p:nvSpPr>
@@ -5542,7 +5568,7 @@
       </p:sp>
       <p:sp>
         <p:nvSpPr>
-          <p:cNvPr id="49" name="Rectangle 48"/>
+          <p:cNvPr id="50" name="Rectangle 49"/>
           <p:cNvSpPr/>
           <p:nvPr/>
         </p:nvSpPr>
@@ -5583,7 +5609,7 @@
       </p:sp>
       <p:sp>
         <p:nvSpPr>
-          <p:cNvPr id="50" name="TextBox 49"/>
+          <p:cNvPr id="51" name="TextBox 50"/>
           <p:cNvSpPr txBox="1"/>
           <p:nvPr/>
         </p:nvSpPr>
@@ -5625,7 +5651,7 @@
       </p:sp>
       <p:sp>
         <p:nvSpPr>
-          <p:cNvPr id="51" name="TextBox 50"/>
+          <p:cNvPr id="52" name="TextBox 51"/>
           <p:cNvSpPr txBox="1"/>
           <p:nvPr/>
         </p:nvSpPr>
@@ -5729,9 +5755,35 @@
         <p:nvPr/>
       </p:nvGrpSpPr>
       <p:grpSpPr/>
-      <p:sp>
-        <p:nvSpPr>
-          <p:cNvPr id="2" name="Rectangle 1"/>
+      <p:pic>
+        <p:nvPicPr>
+          <p:cNvPr id="2" name="Picture 1" descr="bg-p2.png"/>
+          <p:cNvPicPr>
+            <a:picLocks noChangeAspect="1"/>
+          </p:cNvPicPr>
+          <p:nvPr/>
+        </p:nvPicPr>
+        <p:blipFill>
+          <a:blip r:embed="rId2">
+            <a:alphaModFix amt="80000"/>
+          </a:blip>
+          <a:stretch>
+            <a:fillRect/>
+          </a:stretch>
+        </p:blipFill>
+        <p:spPr>
+          <a:xfrm>
+            <a:off x="0" y="0"/>
+            <a:ext cx="7556399" cy="10692000"/>
+          </a:xfrm>
+          <a:prstGeom prst="rect">
+            <a:avLst/>
+          </a:prstGeom>
+        </p:spPr>
+      </p:pic>
+      <p:sp>
+        <p:nvSpPr>
+          <p:cNvPr id="3" name="Rectangle 2"/>
           <p:cNvSpPr/>
           <p:nvPr/>
         </p:nvSpPr>
@@ -5774,7 +5826,7 @@
       </p:sp>
       <p:sp>
         <p:nvSpPr>
-          <p:cNvPr id="3" name="Rectangle 2"/>
+          <p:cNvPr id="4" name="Rectangle 3"/>
           <p:cNvSpPr/>
           <p:nvPr/>
         </p:nvSpPr>
@@ -5815,7 +5867,7 @@
       </p:sp>
       <p:sp>
         <p:nvSpPr>
-          <p:cNvPr id="4" name="Rectangle 3"/>
+          <p:cNvPr id="5" name="Rectangle 4"/>
           <p:cNvSpPr/>
           <p:nvPr/>
         </p:nvSpPr>
@@ -5856,7 +5908,7 @@
       </p:sp>
       <p:sp>
         <p:nvSpPr>
-          <p:cNvPr id="5" name="TextBox 4"/>
+          <p:cNvPr id="6" name="TextBox 5"/>
           <p:cNvSpPr txBox="1"/>
           <p:nvPr/>
         </p:nvSpPr>
@@ -5898,7 +5950,7 @@
       </p:sp>
       <p:sp>
         <p:nvSpPr>
-          <p:cNvPr id="6" name="TextBox 5"/>
+          <p:cNvPr id="7" name="TextBox 6"/>
           <p:cNvSpPr txBox="1"/>
           <p:nvPr/>
         </p:nvSpPr>
@@ -5978,7 +6030,7 @@
       </p:sp>
       <p:sp>
         <p:nvSpPr>
-          <p:cNvPr id="7" name="Rectangle 6"/>
+          <p:cNvPr id="8" name="Rectangle 7"/>
           <p:cNvSpPr/>
           <p:nvPr/>
         </p:nvSpPr>
@@ -6021,7 +6073,7 @@
       </p:sp>
       <p:sp>
         <p:nvSpPr>
-          <p:cNvPr id="8" name="Rectangle 7"/>
+          <p:cNvPr id="9" name="Rectangle 8"/>
           <p:cNvSpPr/>
           <p:nvPr/>
         </p:nvSpPr>
@@ -6062,7 +6114,7 @@
       </p:sp>
       <p:sp>
         <p:nvSpPr>
-          <p:cNvPr id="9" name="Rectangle 8"/>
+          <p:cNvPr id="10" name="Rectangle 9"/>
           <p:cNvSpPr/>
           <p:nvPr/>
         </p:nvSpPr>
@@ -6103,7 +6155,7 @@
       </p:sp>
       <p:sp>
         <p:nvSpPr>
-          <p:cNvPr id="10" name="TextBox 9"/>
+          <p:cNvPr id="11" name="TextBox 10"/>
           <p:cNvSpPr txBox="1"/>
           <p:nvPr/>
         </p:nvSpPr>
@@ -6145,7 +6197,7 @@
       </p:sp>
       <p:sp>
         <p:nvSpPr>
-          <p:cNvPr id="11" name="TextBox 10"/>
+          <p:cNvPr id="12" name="TextBox 11"/>
           <p:cNvSpPr txBox="1"/>
           <p:nvPr/>
         </p:nvSpPr>
@@ -6225,7 +6277,7 @@
       </p:sp>
       <p:sp>
         <p:nvSpPr>
-          <p:cNvPr id="12" name="Rectangle 11"/>
+          <p:cNvPr id="13" name="Rectangle 12"/>
           <p:cNvSpPr/>
           <p:nvPr/>
         </p:nvSpPr>
@@ -6266,7 +6318,7 @@
       </p:sp>
       <p:sp>
         <p:nvSpPr>
-          <p:cNvPr id="13" name="TextBox 12"/>
+          <p:cNvPr id="14" name="TextBox 13"/>
           <p:cNvSpPr txBox="1"/>
           <p:nvPr/>
         </p:nvSpPr>

--- a/assets/fiches/E6-fiche-complet.pptx
+++ b/assets/fiches/E6-fiche-complet.pptx
@@ -3084,9 +3084,12 @@
   <p:cSld>
     <p:bg>
       <p:bgPr>
-        <a:solidFill>
-          <a:srgbClr val="FFFFFF"/>
-        </a:solidFill>
+        <a:blipFill>
+          <a:blip r:embed="rId2"/>
+          <a:stretch>
+            <a:fillRect/>
+          </a:stretch>
+        </a:blipFill>
         <a:effectLst/>
       </p:bgPr>
     </p:bg>
@@ -3097,35 +3100,9 @@
         <p:nvPr/>
       </p:nvGrpSpPr>
       <p:grpSpPr/>
-      <p:pic>
-        <p:nvPicPr>
-          <p:cNvPr id="2" name="Picture 1" descr="bg-p1.png"/>
-          <p:cNvPicPr>
-            <a:picLocks noChangeAspect="1"/>
-          </p:cNvPicPr>
-          <p:nvPr/>
-        </p:nvPicPr>
-        <p:blipFill>
-          <a:blip r:embed="rId2">
-            <a:alphaModFix amt="80000"/>
-          </a:blip>
-          <a:stretch>
-            <a:fillRect/>
-          </a:stretch>
-        </p:blipFill>
-        <p:spPr>
-          <a:xfrm>
-            <a:off x="0" y="0"/>
-            <a:ext cx="7556399" cy="10692000"/>
-          </a:xfrm>
-          <a:prstGeom prst="rect">
-            <a:avLst/>
-          </a:prstGeom>
-        </p:spPr>
-      </p:pic>
-      <p:sp>
-        <p:nvSpPr>
-          <p:cNvPr id="3" name="TextBox 2"/>
+      <p:sp>
+        <p:nvSpPr>
+          <p:cNvPr id="2" name="TextBox 1"/>
           <p:cNvSpPr txBox="1"/>
           <p:nvPr/>
         </p:nvSpPr>
@@ -3186,7 +3163,7 @@
       </p:sp>
       <p:sp>
         <p:nvSpPr>
-          <p:cNvPr id="4" name="Rectangle 3"/>
+          <p:cNvPr id="3" name="Rectangle 2"/>
           <p:cNvSpPr/>
           <p:nvPr/>
         </p:nvSpPr>
@@ -3229,7 +3206,7 @@
       </p:sp>
       <p:sp>
         <p:nvSpPr>
-          <p:cNvPr id="5" name="TextBox 4"/>
+          <p:cNvPr id="4" name="TextBox 3"/>
           <p:cNvSpPr txBox="1"/>
           <p:nvPr/>
         </p:nvSpPr>
@@ -3347,7 +3324,7 @@
       </p:sp>
       <p:sp>
         <p:nvSpPr>
-          <p:cNvPr id="6" name="Rectangle 5"/>
+          <p:cNvPr id="5" name="Rectangle 4"/>
           <p:cNvSpPr/>
           <p:nvPr/>
         </p:nvSpPr>
@@ -3390,7 +3367,7 @@
       </p:sp>
       <p:sp>
         <p:nvSpPr>
-          <p:cNvPr id="7" name="TextBox 6"/>
+          <p:cNvPr id="6" name="TextBox 5"/>
           <p:cNvSpPr txBox="1"/>
           <p:nvPr/>
         </p:nvSpPr>
@@ -3508,7 +3485,7 @@
       </p:sp>
       <p:sp>
         <p:nvSpPr>
-          <p:cNvPr id="8" name="Rectangle 7"/>
+          <p:cNvPr id="7" name="Rectangle 6"/>
           <p:cNvSpPr/>
           <p:nvPr/>
         </p:nvSpPr>
@@ -3551,7 +3528,7 @@
       </p:sp>
       <p:sp>
         <p:nvSpPr>
-          <p:cNvPr id="9" name="Rectangle 8"/>
+          <p:cNvPr id="8" name="Rectangle 7"/>
           <p:cNvSpPr/>
           <p:nvPr/>
         </p:nvSpPr>
@@ -3592,7 +3569,7 @@
       </p:sp>
       <p:sp>
         <p:nvSpPr>
-          <p:cNvPr id="10" name="Rectangle 9"/>
+          <p:cNvPr id="9" name="Rectangle 8"/>
           <p:cNvSpPr/>
           <p:nvPr/>
         </p:nvSpPr>
@@ -3633,7 +3610,7 @@
       </p:sp>
       <p:sp>
         <p:nvSpPr>
-          <p:cNvPr id="11" name="TextBox 10"/>
+          <p:cNvPr id="10" name="TextBox 9"/>
           <p:cNvSpPr txBox="1"/>
           <p:nvPr/>
         </p:nvSpPr>
@@ -3675,7 +3652,7 @@
       </p:sp>
       <p:sp>
         <p:nvSpPr>
-          <p:cNvPr id="12" name="TextBox 11"/>
+          <p:cNvPr id="11" name="TextBox 10"/>
           <p:cNvSpPr txBox="1"/>
           <p:nvPr/>
         </p:nvSpPr>
@@ -3755,7 +3732,7 @@
       </p:sp>
       <p:sp>
         <p:nvSpPr>
-          <p:cNvPr id="13" name="Rectangle 12"/>
+          <p:cNvPr id="12" name="Rectangle 11"/>
           <p:cNvSpPr/>
           <p:nvPr/>
         </p:nvSpPr>
@@ -3798,7 +3775,7 @@
       </p:sp>
       <p:sp>
         <p:nvSpPr>
-          <p:cNvPr id="14" name="Rectangle 13"/>
+          <p:cNvPr id="13" name="Rectangle 12"/>
           <p:cNvSpPr/>
           <p:nvPr/>
         </p:nvSpPr>
@@ -3839,7 +3816,7 @@
       </p:sp>
       <p:sp>
         <p:nvSpPr>
-          <p:cNvPr id="15" name="Rectangle 14"/>
+          <p:cNvPr id="14" name="Rectangle 13"/>
           <p:cNvSpPr/>
           <p:nvPr/>
         </p:nvSpPr>
@@ -3880,7 +3857,7 @@
       </p:sp>
       <p:sp>
         <p:nvSpPr>
-          <p:cNvPr id="16" name="TextBox 15"/>
+          <p:cNvPr id="15" name="TextBox 14"/>
           <p:cNvSpPr txBox="1"/>
           <p:nvPr/>
         </p:nvSpPr>
@@ -3922,7 +3899,7 @@
       </p:sp>
       <p:sp>
         <p:nvSpPr>
-          <p:cNvPr id="17" name="TextBox 16"/>
+          <p:cNvPr id="16" name="TextBox 15"/>
           <p:cNvSpPr txBox="1"/>
           <p:nvPr/>
         </p:nvSpPr>
@@ -4002,7 +3979,7 @@
       </p:sp>
       <p:sp>
         <p:nvSpPr>
-          <p:cNvPr id="18" name="Rectangle 17"/>
+          <p:cNvPr id="17" name="Rectangle 16"/>
           <p:cNvSpPr/>
           <p:nvPr/>
         </p:nvSpPr>
@@ -4045,7 +4022,7 @@
       </p:sp>
       <p:sp>
         <p:nvSpPr>
-          <p:cNvPr id="19" name="Rectangle 18"/>
+          <p:cNvPr id="18" name="Rectangle 17"/>
           <p:cNvSpPr/>
           <p:nvPr/>
         </p:nvSpPr>
@@ -4086,7 +4063,7 @@
       </p:sp>
       <p:sp>
         <p:nvSpPr>
-          <p:cNvPr id="20" name="Rectangle 19"/>
+          <p:cNvPr id="19" name="Rectangle 18"/>
           <p:cNvSpPr/>
           <p:nvPr/>
         </p:nvSpPr>
@@ -4127,7 +4104,7 @@
       </p:sp>
       <p:sp>
         <p:nvSpPr>
-          <p:cNvPr id="21" name="TextBox 20"/>
+          <p:cNvPr id="20" name="TextBox 19"/>
           <p:cNvSpPr txBox="1"/>
           <p:nvPr/>
         </p:nvSpPr>
@@ -4169,7 +4146,7 @@
       </p:sp>
       <p:sp>
         <p:nvSpPr>
-          <p:cNvPr id="22" name="TextBox 21"/>
+          <p:cNvPr id="21" name="TextBox 20"/>
           <p:cNvSpPr txBox="1"/>
           <p:nvPr/>
         </p:nvSpPr>
@@ -4249,7 +4226,7 @@
       </p:sp>
       <p:sp>
         <p:nvSpPr>
-          <p:cNvPr id="23" name="Rectangle 22"/>
+          <p:cNvPr id="22" name="Rectangle 21"/>
           <p:cNvSpPr/>
           <p:nvPr/>
         </p:nvSpPr>
@@ -4292,7 +4269,7 @@
       </p:sp>
       <p:sp>
         <p:nvSpPr>
-          <p:cNvPr id="24" name="Rectangle 23"/>
+          <p:cNvPr id="23" name="Rectangle 22"/>
           <p:cNvSpPr/>
           <p:nvPr/>
         </p:nvSpPr>
@@ -4333,7 +4310,7 @@
       </p:sp>
       <p:sp>
         <p:nvSpPr>
-          <p:cNvPr id="25" name="Rectangle 24"/>
+          <p:cNvPr id="24" name="Rectangle 23"/>
           <p:cNvSpPr/>
           <p:nvPr/>
         </p:nvSpPr>
@@ -4374,7 +4351,7 @@
       </p:sp>
       <p:sp>
         <p:nvSpPr>
-          <p:cNvPr id="26" name="TextBox 25"/>
+          <p:cNvPr id="25" name="TextBox 24"/>
           <p:cNvSpPr txBox="1"/>
           <p:nvPr/>
         </p:nvSpPr>
@@ -4416,7 +4393,7 @@
       </p:sp>
       <p:sp>
         <p:nvSpPr>
-          <p:cNvPr id="27" name="TextBox 26"/>
+          <p:cNvPr id="26" name="TextBox 25"/>
           <p:cNvSpPr txBox="1"/>
           <p:nvPr/>
         </p:nvSpPr>
@@ -4496,7 +4473,7 @@
       </p:sp>
       <p:sp>
         <p:nvSpPr>
-          <p:cNvPr id="28" name="Rectangle 27"/>
+          <p:cNvPr id="27" name="Rectangle 26"/>
           <p:cNvSpPr/>
           <p:nvPr/>
         </p:nvSpPr>
@@ -4539,7 +4516,7 @@
       </p:sp>
       <p:sp>
         <p:nvSpPr>
-          <p:cNvPr id="29" name="Rectangle 28"/>
+          <p:cNvPr id="28" name="Rectangle 27"/>
           <p:cNvSpPr/>
           <p:nvPr/>
         </p:nvSpPr>
@@ -4580,7 +4557,7 @@
       </p:sp>
       <p:sp>
         <p:nvSpPr>
-          <p:cNvPr id="30" name="Rectangle 29"/>
+          <p:cNvPr id="29" name="Rectangle 28"/>
           <p:cNvSpPr/>
           <p:nvPr/>
         </p:nvSpPr>
@@ -4621,7 +4598,7 @@
       </p:sp>
       <p:sp>
         <p:nvSpPr>
-          <p:cNvPr id="31" name="TextBox 30"/>
+          <p:cNvPr id="30" name="TextBox 29"/>
           <p:cNvSpPr txBox="1"/>
           <p:nvPr/>
         </p:nvSpPr>
@@ -4663,7 +4640,7 @@
       </p:sp>
       <p:sp>
         <p:nvSpPr>
-          <p:cNvPr id="32" name="TextBox 31"/>
+          <p:cNvPr id="31" name="TextBox 30"/>
           <p:cNvSpPr txBox="1"/>
           <p:nvPr/>
         </p:nvSpPr>
@@ -4743,7 +4720,7 @@
       </p:sp>
       <p:sp>
         <p:nvSpPr>
-          <p:cNvPr id="33" name="Rectangle 32"/>
+          <p:cNvPr id="32" name="Rectangle 31"/>
           <p:cNvSpPr/>
           <p:nvPr/>
         </p:nvSpPr>
@@ -4786,7 +4763,7 @@
       </p:sp>
       <p:sp>
         <p:nvSpPr>
-          <p:cNvPr id="34" name="Rectangle 33"/>
+          <p:cNvPr id="33" name="Rectangle 32"/>
           <p:cNvSpPr/>
           <p:nvPr/>
         </p:nvSpPr>
@@ -4827,7 +4804,7 @@
       </p:sp>
       <p:sp>
         <p:nvSpPr>
-          <p:cNvPr id="35" name="Rectangle 34"/>
+          <p:cNvPr id="34" name="Rectangle 33"/>
           <p:cNvSpPr/>
           <p:nvPr/>
         </p:nvSpPr>
@@ -4868,7 +4845,7 @@
       </p:sp>
       <p:sp>
         <p:nvSpPr>
-          <p:cNvPr id="36" name="TextBox 35"/>
+          <p:cNvPr id="35" name="TextBox 34"/>
           <p:cNvSpPr txBox="1"/>
           <p:nvPr/>
         </p:nvSpPr>
@@ -4910,7 +4887,7 @@
       </p:sp>
       <p:sp>
         <p:nvSpPr>
-          <p:cNvPr id="37" name="TextBox 36"/>
+          <p:cNvPr id="36" name="TextBox 35"/>
           <p:cNvSpPr txBox="1"/>
           <p:nvPr/>
         </p:nvSpPr>
@@ -4990,7 +4967,7 @@
       </p:sp>
       <p:sp>
         <p:nvSpPr>
-          <p:cNvPr id="38" name="Rectangle 37"/>
+          <p:cNvPr id="37" name="Rectangle 36"/>
           <p:cNvSpPr/>
           <p:nvPr/>
         </p:nvSpPr>
@@ -5033,7 +5010,7 @@
       </p:sp>
       <p:sp>
         <p:nvSpPr>
-          <p:cNvPr id="39" name="Rectangle 38"/>
+          <p:cNvPr id="38" name="Rectangle 37"/>
           <p:cNvSpPr/>
           <p:nvPr/>
         </p:nvSpPr>
@@ -5074,7 +5051,7 @@
       </p:sp>
       <p:sp>
         <p:nvSpPr>
-          <p:cNvPr id="40" name="Rectangle 39"/>
+          <p:cNvPr id="39" name="Rectangle 38"/>
           <p:cNvSpPr/>
           <p:nvPr/>
         </p:nvSpPr>
@@ -5115,7 +5092,7 @@
       </p:sp>
       <p:sp>
         <p:nvSpPr>
-          <p:cNvPr id="41" name="TextBox 40"/>
+          <p:cNvPr id="40" name="TextBox 39"/>
           <p:cNvSpPr txBox="1"/>
           <p:nvPr/>
         </p:nvSpPr>
@@ -5157,7 +5134,7 @@
       </p:sp>
       <p:sp>
         <p:nvSpPr>
-          <p:cNvPr id="42" name="TextBox 41"/>
+          <p:cNvPr id="41" name="TextBox 40"/>
           <p:cNvSpPr txBox="1"/>
           <p:nvPr/>
         </p:nvSpPr>
@@ -5237,7 +5214,7 @@
       </p:sp>
       <p:sp>
         <p:nvSpPr>
-          <p:cNvPr id="43" name="Rectangle 42"/>
+          <p:cNvPr id="42" name="Rectangle 41"/>
           <p:cNvSpPr/>
           <p:nvPr/>
         </p:nvSpPr>
@@ -5280,7 +5257,7 @@
       </p:sp>
       <p:sp>
         <p:nvSpPr>
-          <p:cNvPr id="44" name="Rectangle 43"/>
+          <p:cNvPr id="43" name="Rectangle 42"/>
           <p:cNvSpPr/>
           <p:nvPr/>
         </p:nvSpPr>
@@ -5321,7 +5298,7 @@
       </p:sp>
       <p:sp>
         <p:nvSpPr>
-          <p:cNvPr id="45" name="Rectangle 44"/>
+          <p:cNvPr id="44" name="Rectangle 43"/>
           <p:cNvSpPr/>
           <p:nvPr/>
         </p:nvSpPr>
@@ -5362,7 +5339,7 @@
       </p:sp>
       <p:sp>
         <p:nvSpPr>
-          <p:cNvPr id="46" name="TextBox 45"/>
+          <p:cNvPr id="45" name="TextBox 44"/>
           <p:cNvSpPr txBox="1"/>
           <p:nvPr/>
         </p:nvSpPr>
@@ -5404,7 +5381,7 @@
       </p:sp>
       <p:sp>
         <p:nvSpPr>
-          <p:cNvPr id="47" name="TextBox 46"/>
+          <p:cNvPr id="46" name="TextBox 45"/>
           <p:cNvSpPr txBox="1"/>
           <p:nvPr/>
         </p:nvSpPr>
@@ -5484,7 +5461,7 @@
       </p:sp>
       <p:sp>
         <p:nvSpPr>
-          <p:cNvPr id="48" name="Rectangle 47"/>
+          <p:cNvPr id="47" name="Rectangle 46"/>
           <p:cNvSpPr/>
           <p:nvPr/>
         </p:nvSpPr>
@@ -5527,7 +5504,7 @@
       </p:sp>
       <p:sp>
         <p:nvSpPr>
-          <p:cNvPr id="49" name="Rectangle 48"/>
+          <p:cNvPr id="48" name="Rectangle 47"/>
           <p:cNvSpPr/>
           <p:nvPr/>
         </p:nvSpPr>
@@ -5568,7 +5545,7 @@
       </p:sp>
       <p:sp>
         <p:nvSpPr>
-          <p:cNvPr id="50" name="Rectangle 49"/>
+          <p:cNvPr id="49" name="Rectangle 48"/>
           <p:cNvSpPr/>
           <p:nvPr/>
         </p:nvSpPr>
@@ -5609,7 +5586,7 @@
       </p:sp>
       <p:sp>
         <p:nvSpPr>
-          <p:cNvPr id="51" name="TextBox 50"/>
+          <p:cNvPr id="50" name="TextBox 49"/>
           <p:cNvSpPr txBox="1"/>
           <p:nvPr/>
         </p:nvSpPr>
@@ -5651,7 +5628,7 @@
       </p:sp>
       <p:sp>
         <p:nvSpPr>
-          <p:cNvPr id="52" name="TextBox 51"/>
+          <p:cNvPr id="51" name="TextBox 50"/>
           <p:cNvSpPr txBox="1"/>
           <p:nvPr/>
         </p:nvSpPr>
@@ -5742,9 +5719,12 @@
   <p:cSld>
     <p:bg>
       <p:bgPr>
-        <a:solidFill>
-          <a:srgbClr val="FFFFFF"/>
-        </a:solidFill>
+        <a:blipFill>
+          <a:blip r:embed="rId2"/>
+          <a:stretch>
+            <a:fillRect/>
+          </a:stretch>
+        </a:blipFill>
         <a:effectLst/>
       </p:bgPr>
     </p:bg>
@@ -5755,35 +5735,9 @@
         <p:nvPr/>
       </p:nvGrpSpPr>
       <p:grpSpPr/>
-      <p:pic>
-        <p:nvPicPr>
-          <p:cNvPr id="2" name="Picture 1" descr="bg-p2.png"/>
-          <p:cNvPicPr>
-            <a:picLocks noChangeAspect="1"/>
-          </p:cNvPicPr>
-          <p:nvPr/>
-        </p:nvPicPr>
-        <p:blipFill>
-          <a:blip r:embed="rId2">
-            <a:alphaModFix amt="80000"/>
-          </a:blip>
-          <a:stretch>
-            <a:fillRect/>
-          </a:stretch>
-        </p:blipFill>
-        <p:spPr>
-          <a:xfrm>
-            <a:off x="0" y="0"/>
-            <a:ext cx="7556399" cy="10692000"/>
-          </a:xfrm>
-          <a:prstGeom prst="rect">
-            <a:avLst/>
-          </a:prstGeom>
-        </p:spPr>
-      </p:pic>
-      <p:sp>
-        <p:nvSpPr>
-          <p:cNvPr id="3" name="Rectangle 2"/>
+      <p:sp>
+        <p:nvSpPr>
+          <p:cNvPr id="2" name="Rectangle 1"/>
           <p:cNvSpPr/>
           <p:nvPr/>
         </p:nvSpPr>
@@ -5826,7 +5780,7 @@
       </p:sp>
       <p:sp>
         <p:nvSpPr>
-          <p:cNvPr id="4" name="Rectangle 3"/>
+          <p:cNvPr id="3" name="Rectangle 2"/>
           <p:cNvSpPr/>
           <p:nvPr/>
         </p:nvSpPr>
@@ -5867,7 +5821,7 @@
       </p:sp>
       <p:sp>
         <p:nvSpPr>
-          <p:cNvPr id="5" name="Rectangle 4"/>
+          <p:cNvPr id="4" name="Rectangle 3"/>
           <p:cNvSpPr/>
           <p:nvPr/>
         </p:nvSpPr>
@@ -5908,7 +5862,7 @@
       </p:sp>
       <p:sp>
         <p:nvSpPr>
-          <p:cNvPr id="6" name="TextBox 5"/>
+          <p:cNvPr id="5" name="TextBox 4"/>
           <p:cNvSpPr txBox="1"/>
           <p:nvPr/>
         </p:nvSpPr>
@@ -5950,7 +5904,7 @@
       </p:sp>
       <p:sp>
         <p:nvSpPr>
-          <p:cNvPr id="7" name="TextBox 6"/>
+          <p:cNvPr id="6" name="TextBox 5"/>
           <p:cNvSpPr txBox="1"/>
           <p:nvPr/>
         </p:nvSpPr>
@@ -6030,7 +5984,7 @@
       </p:sp>
       <p:sp>
         <p:nvSpPr>
-          <p:cNvPr id="8" name="Rectangle 7"/>
+          <p:cNvPr id="7" name="Rectangle 6"/>
           <p:cNvSpPr/>
           <p:nvPr/>
         </p:nvSpPr>
@@ -6073,7 +6027,7 @@
       </p:sp>
       <p:sp>
         <p:nvSpPr>
-          <p:cNvPr id="9" name="Rectangle 8"/>
+          <p:cNvPr id="8" name="Rectangle 7"/>
           <p:cNvSpPr/>
           <p:nvPr/>
         </p:nvSpPr>
@@ -6114,7 +6068,7 @@
       </p:sp>
       <p:sp>
         <p:nvSpPr>
-          <p:cNvPr id="10" name="Rectangle 9"/>
+          <p:cNvPr id="9" name="Rectangle 8"/>
           <p:cNvSpPr/>
           <p:nvPr/>
         </p:nvSpPr>
@@ -6155,7 +6109,7 @@
       </p:sp>
       <p:sp>
         <p:nvSpPr>
-          <p:cNvPr id="11" name="TextBox 10"/>
+          <p:cNvPr id="10" name="TextBox 9"/>
           <p:cNvSpPr txBox="1"/>
           <p:nvPr/>
         </p:nvSpPr>
@@ -6197,7 +6151,7 @@
       </p:sp>
       <p:sp>
         <p:nvSpPr>
-          <p:cNvPr id="12" name="TextBox 11"/>
+          <p:cNvPr id="11" name="TextBox 10"/>
           <p:cNvSpPr txBox="1"/>
           <p:nvPr/>
         </p:nvSpPr>
@@ -6277,7 +6231,7 @@
       </p:sp>
       <p:sp>
         <p:nvSpPr>
-          <p:cNvPr id="13" name="Rectangle 12"/>
+          <p:cNvPr id="12" name="Rectangle 11"/>
           <p:cNvSpPr/>
           <p:nvPr/>
         </p:nvSpPr>
@@ -6318,7 +6272,7 @@
       </p:sp>
       <p:sp>
         <p:nvSpPr>
-          <p:cNvPr id="14" name="TextBox 13"/>
+          <p:cNvPr id="13" name="TextBox 12"/>
           <p:cNvSpPr txBox="1"/>
           <p:nvPr/>
         </p:nvSpPr>
